--- a/experiments/07_longitudinal_panel/Exp07_status_update.pptx
+++ b/experiments/07_longitudinal_panel/Exp07_status_update.pptx
@@ -9744,8 +9744,8 @@
         </p:nvCxnSpPr>
         <p:spPr>
           <a:xfrm>
-            <a:off x="2240280" y="2628900.0"/>
-            <a:ext cx="2834640" cy="1097280.0"/>
+            <a:off x="2240280" y="2628900"/>
+            <a:ext cx="2834640" cy="1097280"/>
           </a:xfrm>
           <a:prstGeom prst="line">
             <a:avLst/>
@@ -9780,8 +9780,8 @@
         </p:nvCxnSpPr>
         <p:spPr>
           <a:xfrm>
-            <a:off x="2240280" y="3726180.0"/>
-            <a:ext cx="502920" cy="0.0"/>
+            <a:off x="2240280" y="3726180"/>
+            <a:ext cx="502920" cy="0"/>
           </a:xfrm>
           <a:prstGeom prst="line">
             <a:avLst/>
@@ -9816,8 +9816,8 @@
         </p:nvCxnSpPr>
         <p:spPr>
           <a:xfrm>
-            <a:off x="4480560" y="3726180.0"/>
-            <a:ext cx="594360" cy="0.0"/>
+            <a:off x="4480560" y="3726180"/>
+            <a:ext cx="594360" cy="0"/>
           </a:xfrm>
           <a:prstGeom prst="line">
             <a:avLst/>
@@ -9852,8 +9852,8 @@
         </p:nvCxnSpPr>
         <p:spPr>
           <a:xfrm>
-            <a:off x="2240280" y="4823460.0"/>
-            <a:ext cx="502920" cy="0.0"/>
+            <a:off x="2240280" y="4823460"/>
+            <a:ext cx="502920" cy="0"/>
           </a:xfrm>
           <a:prstGeom prst="line">
             <a:avLst/>
@@ -9888,8 +9888,8 @@
         </p:nvCxnSpPr>
         <p:spPr>
           <a:xfrm flipV="1">
-            <a:off x="4480560" y="3726180.0"/>
-            <a:ext cx="594360" cy="1097280.0"/>
+            <a:off x="4480560" y="3726180"/>
+            <a:ext cx="594360" cy="1097280"/>
           </a:xfrm>
           <a:prstGeom prst="line">
             <a:avLst/>
@@ -9924,8 +9924,8 @@
         </p:nvCxnSpPr>
         <p:spPr>
           <a:xfrm>
-            <a:off x="6629400" y="3726180.0"/>
-            <a:ext cx="685800" cy="0.0"/>
+            <a:off x="6629400" y="3726180"/>
+            <a:ext cx="685800" cy="0"/>
           </a:xfrm>
           <a:prstGeom prst="line">
             <a:avLst/>
@@ -10234,7 +10234,7 @@
         <p:spPr>
           <a:xfrm>
             <a:off x="685800" y="2651760"/>
-            <a:ext cx="5577840" cy="3635577"/>
+            <a:ext cx="5577840" cy="3269255"/>
           </a:xfrm>
           <a:prstGeom prst="roundRect">
             <a:avLst>
@@ -10458,7 +10458,7 @@
         <p:spPr>
           <a:xfrm>
             <a:off x="758952" y="2724912"/>
-            <a:ext cx="5431536" cy="3489273"/>
+            <a:ext cx="5431536" cy="3122951"/>
           </a:xfrm>
           <a:prstGeom prst="rect">
             <a:avLst/>
@@ -10473,7 +10473,7 @@
         </p:nvSpPr>
         <p:spPr>
           <a:xfrm>
-            <a:off x="685800" y="6342201"/>
+            <a:off x="685800" y="5975879"/>
             <a:ext cx="5577840" cy="274320"/>
           </a:xfrm>
           <a:prstGeom prst="rect">
